--- a/dist/초6/국어/토론과글쓰기/초6_국어_토론과글쓰기_03_독자를생각하며고쳐쓰기.pptx
+++ b/dist/초6/국어/토론과글쓰기/초6_국어_토론과글쓰기_03_독자를생각하며고쳐쓰기.pptx
@@ -121,13 +121,13 @@
   <p:extLst>
     <p:ext uri="{521415D9-36F7-43E2-AB2F-B90AF26B5E84}">
       <p14:sectionLst xmlns:p14="http://schemas.microsoft.com/office/powerpoint/2010/main">
-        <p14:section name="도입" id="{0ab182d9-a21c-0437-19a0-c7668aef74c8}">
+        <p14:section name="도입" id="{0afc1dbf-5ca5-5e0d-6095-b508347befb7}">
           <p14:sldIdLst>
             <p14:sldId id="256"/>
             <p14:sldId id="257"/>
           </p14:sldIdLst>
         </p14:section>
-        <p14:section name="개념" id="{ec4f49d2-e6dc-2d7b-fc8a-4e3e623fcc4d}">
+        <p14:section name="개념" id="{18551e7e-a262-d34e-261b-5deb78ea3766}">
           <p14:sldIdLst>
             <p14:sldId id="258"/>
             <p14:sldId id="259"/>
@@ -136,26 +136,26 @@
             <p14:sldId id="262"/>
           </p14:sldIdLst>
         </p14:section>
-        <p14:section name="연습" id="{b3c0a747-e08d-97a7-84c3-e75ff00f9ab6}">
+        <p14:section name="연습" id="{c385da45-8721-6ceb-2d09-a7b2be29fdb2}">
           <p14:sldIdLst>
             <p14:sldId id="263"/>
             <p14:sldId id="264"/>
             <p14:sldId id="265"/>
           </p14:sldIdLst>
         </p14:section>
-        <p14:section name="확인" id="{c43b6e76-9df9-083d-4900-43cbc163d526}">
+        <p14:section name="확인" id="{8f810f3b-c905-44f7-177a-ab4dfd74db06}">
           <p14:sldIdLst>
             <p14:sldId id="266"/>
             <p14:sldId id="267"/>
             <p14:sldId id="268"/>
           </p14:sldIdLst>
         </p14:section>
-        <p14:section name="정리" id="{47895a0e-ad1f-82c0-ebef-2902392bf550}">
+        <p14:section name="정리" id="{fa8ea43a-5b20-9e7f-f873-d1ab64d7f67f}">
           <p14:sldIdLst>
             <p14:sldId id="269"/>
           </p14:sldIdLst>
         </p14:section>
-        <p14:section name="보충" id="{08f733f5-7908-a95c-c4e0-4e91649b1a10}">
+        <p14:section name="보충" id="{4be7f9d9-92e6-85cf-6992-c47704632417}">
           <p14:sldIdLst>
             <p14:sldId id="270"/>
           </p14:sldIdLst>
